--- a/主恩典.pptx
+++ b/主恩典.pptx
@@ -169,10 +169,9 @@
           <a:lstStyle/>
           <a:p>
             <a:r>
-              <a:rPr lang="zh-TW" altLang="en-US" smtClean="0"/>
+              <a:rPr lang="zh-TW" altLang="en-US"/>
               <a:t>按一下以編輯母片標題樣式</a:t>
             </a:r>
-            <a:endParaRPr lang="zh-TW" altLang="en-US"/>
           </a:p>
         </p:txBody>
       </p:sp>
@@ -288,10 +287,9 @@
           </a:lstStyle>
           <a:p>
             <a:r>
-              <a:rPr lang="zh-TW" altLang="en-US" smtClean="0"/>
+              <a:rPr lang="zh-TW" altLang="en-US"/>
               <a:t>按一下以編輯母片副標題樣式</a:t>
             </a:r>
-            <a:endParaRPr lang="zh-TW" altLang="en-US"/>
           </a:p>
         </p:txBody>
       </p:sp>
@@ -312,7 +310,7 @@
           <a:p>
             <a:fld id="{DE59D944-54CB-47B0-9464-FA766A8DDC46}" type="datetimeFigureOut">
               <a:rPr lang="zh-TW" altLang="en-US" smtClean="0"/>
-              <a:t>2023/7/7</a:t>
+              <a:t>2024/7/27</a:t>
             </a:fld>
             <a:endParaRPr lang="zh-TW" altLang="en-US"/>
           </a:p>
@@ -401,10 +399,9 @@
           <a:lstStyle/>
           <a:p>
             <a:r>
-              <a:rPr lang="zh-TW" altLang="en-US" smtClean="0"/>
+              <a:rPr lang="zh-TW" altLang="en-US"/>
               <a:t>按一下以編輯母片標題樣式</a:t>
             </a:r>
-            <a:endParaRPr lang="zh-TW" altLang="en-US"/>
           </a:p>
         </p:txBody>
       </p:sp>
@@ -425,38 +422,37 @@
           <a:p>
             <a:pPr lvl="0"/>
             <a:r>
-              <a:rPr lang="zh-TW" altLang="en-US" smtClean="0"/>
+              <a:rPr lang="zh-TW" altLang="en-US"/>
               <a:t>按一下以編輯母片文字樣式</a:t>
             </a:r>
           </a:p>
           <a:p>
             <a:pPr lvl="1"/>
             <a:r>
-              <a:rPr lang="zh-TW" altLang="en-US" smtClean="0"/>
+              <a:rPr lang="zh-TW" altLang="en-US"/>
               <a:t>第二層</a:t>
             </a:r>
           </a:p>
           <a:p>
             <a:pPr lvl="2"/>
             <a:r>
-              <a:rPr lang="zh-TW" altLang="en-US" smtClean="0"/>
+              <a:rPr lang="zh-TW" altLang="en-US"/>
               <a:t>第三層</a:t>
             </a:r>
           </a:p>
           <a:p>
             <a:pPr lvl="3"/>
             <a:r>
-              <a:rPr lang="zh-TW" altLang="en-US" smtClean="0"/>
+              <a:rPr lang="zh-TW" altLang="en-US"/>
               <a:t>第四層</a:t>
             </a:r>
           </a:p>
           <a:p>
             <a:pPr lvl="4"/>
             <a:r>
-              <a:rPr lang="zh-TW" altLang="en-US" smtClean="0"/>
+              <a:rPr lang="zh-TW" altLang="en-US"/>
               <a:t>第五層</a:t>
             </a:r>
-            <a:endParaRPr lang="zh-TW" altLang="en-US"/>
           </a:p>
         </p:txBody>
       </p:sp>
@@ -477,7 +473,7 @@
           <a:p>
             <a:fld id="{DE59D944-54CB-47B0-9464-FA766A8DDC46}" type="datetimeFigureOut">
               <a:rPr lang="zh-TW" altLang="en-US" smtClean="0"/>
-              <a:t>2023/7/7</a:t>
+              <a:t>2024/7/27</a:t>
             </a:fld>
             <a:endParaRPr lang="zh-TW" altLang="en-US"/>
           </a:p>
@@ -571,10 +567,9 @@
           <a:lstStyle/>
           <a:p>
             <a:r>
-              <a:rPr lang="zh-TW" altLang="en-US" smtClean="0"/>
+              <a:rPr lang="zh-TW" altLang="en-US"/>
               <a:t>按一下以編輯母片標題樣式</a:t>
             </a:r>
-            <a:endParaRPr lang="zh-TW" altLang="en-US"/>
           </a:p>
         </p:txBody>
       </p:sp>
@@ -600,38 +595,37 @@
           <a:p>
             <a:pPr lvl="0"/>
             <a:r>
-              <a:rPr lang="zh-TW" altLang="en-US" smtClean="0"/>
+              <a:rPr lang="zh-TW" altLang="en-US"/>
               <a:t>按一下以編輯母片文字樣式</a:t>
             </a:r>
           </a:p>
           <a:p>
             <a:pPr lvl="1"/>
             <a:r>
-              <a:rPr lang="zh-TW" altLang="en-US" smtClean="0"/>
+              <a:rPr lang="zh-TW" altLang="en-US"/>
               <a:t>第二層</a:t>
             </a:r>
           </a:p>
           <a:p>
             <a:pPr lvl="2"/>
             <a:r>
-              <a:rPr lang="zh-TW" altLang="en-US" smtClean="0"/>
+              <a:rPr lang="zh-TW" altLang="en-US"/>
               <a:t>第三層</a:t>
             </a:r>
           </a:p>
           <a:p>
             <a:pPr lvl="3"/>
             <a:r>
-              <a:rPr lang="zh-TW" altLang="en-US" smtClean="0"/>
+              <a:rPr lang="zh-TW" altLang="en-US"/>
               <a:t>第四層</a:t>
             </a:r>
           </a:p>
           <a:p>
             <a:pPr lvl="4"/>
             <a:r>
-              <a:rPr lang="zh-TW" altLang="en-US" smtClean="0"/>
+              <a:rPr lang="zh-TW" altLang="en-US"/>
               <a:t>第五層</a:t>
             </a:r>
-            <a:endParaRPr lang="zh-TW" altLang="en-US"/>
           </a:p>
         </p:txBody>
       </p:sp>
@@ -652,7 +646,7 @@
           <a:p>
             <a:fld id="{DE59D944-54CB-47B0-9464-FA766A8DDC46}" type="datetimeFigureOut">
               <a:rPr lang="zh-TW" altLang="en-US" smtClean="0"/>
-              <a:t>2023/7/7</a:t>
+              <a:t>2024/7/27</a:t>
             </a:fld>
             <a:endParaRPr lang="zh-TW" altLang="en-US"/>
           </a:p>
@@ -741,10 +735,9 @@
           <a:lstStyle/>
           <a:p>
             <a:r>
-              <a:rPr lang="zh-TW" altLang="en-US" smtClean="0"/>
+              <a:rPr lang="zh-TW" altLang="en-US"/>
               <a:t>按一下以編輯母片標題樣式</a:t>
             </a:r>
-            <a:endParaRPr lang="zh-TW" altLang="en-US"/>
           </a:p>
         </p:txBody>
       </p:sp>
@@ -765,38 +758,37 @@
           <a:p>
             <a:pPr lvl="0"/>
             <a:r>
-              <a:rPr lang="zh-TW" altLang="en-US" smtClean="0"/>
+              <a:rPr lang="zh-TW" altLang="en-US"/>
               <a:t>按一下以編輯母片文字樣式</a:t>
             </a:r>
           </a:p>
           <a:p>
             <a:pPr lvl="1"/>
             <a:r>
-              <a:rPr lang="zh-TW" altLang="en-US" smtClean="0"/>
+              <a:rPr lang="zh-TW" altLang="en-US"/>
               <a:t>第二層</a:t>
             </a:r>
           </a:p>
           <a:p>
             <a:pPr lvl="2"/>
             <a:r>
-              <a:rPr lang="zh-TW" altLang="en-US" smtClean="0"/>
+              <a:rPr lang="zh-TW" altLang="en-US"/>
               <a:t>第三層</a:t>
             </a:r>
           </a:p>
           <a:p>
             <a:pPr lvl="3"/>
             <a:r>
-              <a:rPr lang="zh-TW" altLang="en-US" smtClean="0"/>
+              <a:rPr lang="zh-TW" altLang="en-US"/>
               <a:t>第四層</a:t>
             </a:r>
           </a:p>
           <a:p>
             <a:pPr lvl="4"/>
             <a:r>
-              <a:rPr lang="zh-TW" altLang="en-US" smtClean="0"/>
+              <a:rPr lang="zh-TW" altLang="en-US"/>
               <a:t>第五層</a:t>
             </a:r>
-            <a:endParaRPr lang="zh-TW" altLang="en-US"/>
           </a:p>
         </p:txBody>
       </p:sp>
@@ -817,7 +809,7 @@
           <a:p>
             <a:fld id="{DE59D944-54CB-47B0-9464-FA766A8DDC46}" type="datetimeFigureOut">
               <a:rPr lang="zh-TW" altLang="en-US" smtClean="0"/>
-              <a:t>2023/7/7</a:t>
+              <a:t>2024/7/27</a:t>
             </a:fld>
             <a:endParaRPr lang="zh-TW" altLang="en-US"/>
           </a:p>
@@ -915,10 +907,9 @@
           </a:lstStyle>
           <a:p>
             <a:r>
-              <a:rPr lang="zh-TW" altLang="en-US" smtClean="0"/>
+              <a:rPr lang="zh-TW" altLang="en-US"/>
               <a:t>按一下以編輯母片標題樣式</a:t>
             </a:r>
-            <a:endParaRPr lang="zh-TW" altLang="en-US"/>
           </a:p>
         </p:txBody>
       </p:sp>
@@ -1035,7 +1026,7 @@
           <a:p>
             <a:pPr lvl="0"/>
             <a:r>
-              <a:rPr lang="zh-TW" altLang="en-US" smtClean="0"/>
+              <a:rPr lang="zh-TW" altLang="en-US"/>
               <a:t>按一下以編輯母片文字樣式</a:t>
             </a:r>
           </a:p>
@@ -1058,7 +1049,7 @@
           <a:p>
             <a:fld id="{DE59D944-54CB-47B0-9464-FA766A8DDC46}" type="datetimeFigureOut">
               <a:rPr lang="zh-TW" altLang="en-US" smtClean="0"/>
-              <a:t>2023/7/7</a:t>
+              <a:t>2024/7/27</a:t>
             </a:fld>
             <a:endParaRPr lang="zh-TW" altLang="en-US"/>
           </a:p>
@@ -1147,10 +1138,9 @@
           <a:lstStyle/>
           <a:p>
             <a:r>
-              <a:rPr lang="zh-TW" altLang="en-US" smtClean="0"/>
+              <a:rPr lang="zh-TW" altLang="en-US"/>
               <a:t>按一下以編輯母片標題樣式</a:t>
             </a:r>
-            <a:endParaRPr lang="zh-TW" altLang="en-US"/>
           </a:p>
         </p:txBody>
       </p:sp>
@@ -1204,38 +1194,37 @@
           <a:p>
             <a:pPr lvl="0"/>
             <a:r>
-              <a:rPr lang="zh-TW" altLang="en-US" smtClean="0"/>
+              <a:rPr lang="zh-TW" altLang="en-US"/>
               <a:t>按一下以編輯母片文字樣式</a:t>
             </a:r>
           </a:p>
           <a:p>
             <a:pPr lvl="1"/>
             <a:r>
-              <a:rPr lang="zh-TW" altLang="en-US" smtClean="0"/>
+              <a:rPr lang="zh-TW" altLang="en-US"/>
               <a:t>第二層</a:t>
             </a:r>
           </a:p>
           <a:p>
             <a:pPr lvl="2"/>
             <a:r>
-              <a:rPr lang="zh-TW" altLang="en-US" smtClean="0"/>
+              <a:rPr lang="zh-TW" altLang="en-US"/>
               <a:t>第三層</a:t>
             </a:r>
           </a:p>
           <a:p>
             <a:pPr lvl="3"/>
             <a:r>
-              <a:rPr lang="zh-TW" altLang="en-US" smtClean="0"/>
+              <a:rPr lang="zh-TW" altLang="en-US"/>
               <a:t>第四層</a:t>
             </a:r>
           </a:p>
           <a:p>
             <a:pPr lvl="4"/>
             <a:r>
-              <a:rPr lang="zh-TW" altLang="en-US" smtClean="0"/>
+              <a:rPr lang="zh-TW" altLang="en-US"/>
               <a:t>第五層</a:t>
             </a:r>
-            <a:endParaRPr lang="zh-TW" altLang="en-US"/>
           </a:p>
         </p:txBody>
       </p:sp>
@@ -1289,38 +1278,37 @@
           <a:p>
             <a:pPr lvl="0"/>
             <a:r>
-              <a:rPr lang="zh-TW" altLang="en-US" smtClean="0"/>
+              <a:rPr lang="zh-TW" altLang="en-US"/>
               <a:t>按一下以編輯母片文字樣式</a:t>
             </a:r>
           </a:p>
           <a:p>
             <a:pPr lvl="1"/>
             <a:r>
-              <a:rPr lang="zh-TW" altLang="en-US" smtClean="0"/>
+              <a:rPr lang="zh-TW" altLang="en-US"/>
               <a:t>第二層</a:t>
             </a:r>
           </a:p>
           <a:p>
             <a:pPr lvl="2"/>
             <a:r>
-              <a:rPr lang="zh-TW" altLang="en-US" smtClean="0"/>
+              <a:rPr lang="zh-TW" altLang="en-US"/>
               <a:t>第三層</a:t>
             </a:r>
           </a:p>
           <a:p>
             <a:pPr lvl="3"/>
             <a:r>
-              <a:rPr lang="zh-TW" altLang="en-US" smtClean="0"/>
+              <a:rPr lang="zh-TW" altLang="en-US"/>
               <a:t>第四層</a:t>
             </a:r>
           </a:p>
           <a:p>
             <a:pPr lvl="4"/>
             <a:r>
-              <a:rPr lang="zh-TW" altLang="en-US" smtClean="0"/>
+              <a:rPr lang="zh-TW" altLang="en-US"/>
               <a:t>第五層</a:t>
             </a:r>
-            <a:endParaRPr lang="zh-TW" altLang="en-US"/>
           </a:p>
         </p:txBody>
       </p:sp>
@@ -1341,7 +1329,7 @@
           <a:p>
             <a:fld id="{DE59D944-54CB-47B0-9464-FA766A8DDC46}" type="datetimeFigureOut">
               <a:rPr lang="zh-TW" altLang="en-US" smtClean="0"/>
-              <a:t>2023/7/7</a:t>
+              <a:t>2024/7/27</a:t>
             </a:fld>
             <a:endParaRPr lang="zh-TW" altLang="en-US"/>
           </a:p>
@@ -1434,10 +1422,9 @@
           </a:lstStyle>
           <a:p>
             <a:r>
-              <a:rPr lang="zh-TW" altLang="en-US" smtClean="0"/>
+              <a:rPr lang="zh-TW" altLang="en-US"/>
               <a:t>按一下以編輯母片標題樣式</a:t>
             </a:r>
-            <a:endParaRPr lang="zh-TW" altLang="en-US"/>
           </a:p>
         </p:txBody>
       </p:sp>
@@ -1500,7 +1487,7 @@
           <a:p>
             <a:pPr lvl="0"/>
             <a:r>
-              <a:rPr lang="zh-TW" altLang="en-US" smtClean="0"/>
+              <a:rPr lang="zh-TW" altLang="en-US"/>
               <a:t>按一下以編輯母片文字樣式</a:t>
             </a:r>
           </a:p>
@@ -1556,38 +1543,37 @@
           <a:p>
             <a:pPr lvl="0"/>
             <a:r>
-              <a:rPr lang="zh-TW" altLang="en-US" smtClean="0"/>
+              <a:rPr lang="zh-TW" altLang="en-US"/>
               <a:t>按一下以編輯母片文字樣式</a:t>
             </a:r>
           </a:p>
           <a:p>
             <a:pPr lvl="1"/>
             <a:r>
-              <a:rPr lang="zh-TW" altLang="en-US" smtClean="0"/>
+              <a:rPr lang="zh-TW" altLang="en-US"/>
               <a:t>第二層</a:t>
             </a:r>
           </a:p>
           <a:p>
             <a:pPr lvl="2"/>
             <a:r>
-              <a:rPr lang="zh-TW" altLang="en-US" smtClean="0"/>
+              <a:rPr lang="zh-TW" altLang="en-US"/>
               <a:t>第三層</a:t>
             </a:r>
           </a:p>
           <a:p>
             <a:pPr lvl="3"/>
             <a:r>
-              <a:rPr lang="zh-TW" altLang="en-US" smtClean="0"/>
+              <a:rPr lang="zh-TW" altLang="en-US"/>
               <a:t>第四層</a:t>
             </a:r>
           </a:p>
           <a:p>
             <a:pPr lvl="4"/>
             <a:r>
-              <a:rPr lang="zh-TW" altLang="en-US" smtClean="0"/>
+              <a:rPr lang="zh-TW" altLang="en-US"/>
               <a:t>第五層</a:t>
             </a:r>
-            <a:endParaRPr lang="zh-TW" altLang="en-US"/>
           </a:p>
         </p:txBody>
       </p:sp>
@@ -1650,7 +1636,7 @@
           <a:p>
             <a:pPr lvl="0"/>
             <a:r>
-              <a:rPr lang="zh-TW" altLang="en-US" smtClean="0"/>
+              <a:rPr lang="zh-TW" altLang="en-US"/>
               <a:t>按一下以編輯母片文字樣式</a:t>
             </a:r>
           </a:p>
@@ -1706,38 +1692,37 @@
           <a:p>
             <a:pPr lvl="0"/>
             <a:r>
-              <a:rPr lang="zh-TW" altLang="en-US" smtClean="0"/>
+              <a:rPr lang="zh-TW" altLang="en-US"/>
               <a:t>按一下以編輯母片文字樣式</a:t>
             </a:r>
           </a:p>
           <a:p>
             <a:pPr lvl="1"/>
             <a:r>
-              <a:rPr lang="zh-TW" altLang="en-US" smtClean="0"/>
+              <a:rPr lang="zh-TW" altLang="en-US"/>
               <a:t>第二層</a:t>
             </a:r>
           </a:p>
           <a:p>
             <a:pPr lvl="2"/>
             <a:r>
-              <a:rPr lang="zh-TW" altLang="en-US" smtClean="0"/>
+              <a:rPr lang="zh-TW" altLang="en-US"/>
               <a:t>第三層</a:t>
             </a:r>
           </a:p>
           <a:p>
             <a:pPr lvl="3"/>
             <a:r>
-              <a:rPr lang="zh-TW" altLang="en-US" smtClean="0"/>
+              <a:rPr lang="zh-TW" altLang="en-US"/>
               <a:t>第四層</a:t>
             </a:r>
           </a:p>
           <a:p>
             <a:pPr lvl="4"/>
             <a:r>
-              <a:rPr lang="zh-TW" altLang="en-US" smtClean="0"/>
+              <a:rPr lang="zh-TW" altLang="en-US"/>
               <a:t>第五層</a:t>
             </a:r>
-            <a:endParaRPr lang="zh-TW" altLang="en-US"/>
           </a:p>
         </p:txBody>
       </p:sp>
@@ -1758,7 +1743,7 @@
           <a:p>
             <a:fld id="{DE59D944-54CB-47B0-9464-FA766A8DDC46}" type="datetimeFigureOut">
               <a:rPr lang="zh-TW" altLang="en-US" smtClean="0"/>
-              <a:t>2023/7/7</a:t>
+              <a:t>2024/7/27</a:t>
             </a:fld>
             <a:endParaRPr lang="zh-TW" altLang="en-US"/>
           </a:p>
@@ -1847,10 +1832,9 @@
           <a:lstStyle/>
           <a:p>
             <a:r>
-              <a:rPr lang="zh-TW" altLang="en-US" smtClean="0"/>
+              <a:rPr lang="zh-TW" altLang="en-US"/>
               <a:t>按一下以編輯母片標題樣式</a:t>
             </a:r>
-            <a:endParaRPr lang="zh-TW" altLang="en-US"/>
           </a:p>
         </p:txBody>
       </p:sp>
@@ -1871,7 +1855,7 @@
           <a:p>
             <a:fld id="{DE59D944-54CB-47B0-9464-FA766A8DDC46}" type="datetimeFigureOut">
               <a:rPr lang="zh-TW" altLang="en-US" smtClean="0"/>
-              <a:t>2023/7/7</a:t>
+              <a:t>2024/7/27</a:t>
             </a:fld>
             <a:endParaRPr lang="zh-TW" altLang="en-US"/>
           </a:p>
@@ -1961,7 +1945,7 @@
           <a:p>
             <a:fld id="{DE59D944-54CB-47B0-9464-FA766A8DDC46}" type="datetimeFigureOut">
               <a:rPr lang="zh-TW" altLang="en-US" smtClean="0"/>
-              <a:t>2023/7/7</a:t>
+              <a:t>2024/7/27</a:t>
             </a:fld>
             <a:endParaRPr lang="zh-TW" altLang="en-US"/>
           </a:p>
@@ -2059,10 +2043,9 @@
           </a:lstStyle>
           <a:p>
             <a:r>
-              <a:rPr lang="zh-TW" altLang="en-US" smtClean="0"/>
+              <a:rPr lang="zh-TW" altLang="en-US"/>
               <a:t>按一下以編輯母片標題樣式</a:t>
             </a:r>
-            <a:endParaRPr lang="zh-TW" altLang="en-US"/>
           </a:p>
         </p:txBody>
       </p:sp>
@@ -2116,38 +2099,37 @@
           <a:p>
             <a:pPr lvl="0"/>
             <a:r>
-              <a:rPr lang="zh-TW" altLang="en-US" smtClean="0"/>
+              <a:rPr lang="zh-TW" altLang="en-US"/>
               <a:t>按一下以編輯母片文字樣式</a:t>
             </a:r>
           </a:p>
           <a:p>
             <a:pPr lvl="1"/>
             <a:r>
-              <a:rPr lang="zh-TW" altLang="en-US" smtClean="0"/>
+              <a:rPr lang="zh-TW" altLang="en-US"/>
               <a:t>第二層</a:t>
             </a:r>
           </a:p>
           <a:p>
             <a:pPr lvl="2"/>
             <a:r>
-              <a:rPr lang="zh-TW" altLang="en-US" smtClean="0"/>
+              <a:rPr lang="zh-TW" altLang="en-US"/>
               <a:t>第三層</a:t>
             </a:r>
           </a:p>
           <a:p>
             <a:pPr lvl="3"/>
             <a:r>
-              <a:rPr lang="zh-TW" altLang="en-US" smtClean="0"/>
+              <a:rPr lang="zh-TW" altLang="en-US"/>
               <a:t>第四層</a:t>
             </a:r>
           </a:p>
           <a:p>
             <a:pPr lvl="4"/>
             <a:r>
-              <a:rPr lang="zh-TW" altLang="en-US" smtClean="0"/>
+              <a:rPr lang="zh-TW" altLang="en-US"/>
               <a:t>第五層</a:t>
             </a:r>
-            <a:endParaRPr lang="zh-TW" altLang="en-US"/>
           </a:p>
         </p:txBody>
       </p:sp>
@@ -2210,7 +2192,7 @@
           <a:p>
             <a:pPr lvl="0"/>
             <a:r>
-              <a:rPr lang="zh-TW" altLang="en-US" smtClean="0"/>
+              <a:rPr lang="zh-TW" altLang="en-US"/>
               <a:t>按一下以編輯母片文字樣式</a:t>
             </a:r>
           </a:p>
@@ -2233,7 +2215,7 @@
           <a:p>
             <a:fld id="{DE59D944-54CB-47B0-9464-FA766A8DDC46}" type="datetimeFigureOut">
               <a:rPr lang="zh-TW" altLang="en-US" smtClean="0"/>
-              <a:t>2023/7/7</a:t>
+              <a:t>2024/7/27</a:t>
             </a:fld>
             <a:endParaRPr lang="zh-TW" altLang="en-US"/>
           </a:p>
@@ -2331,10 +2313,9 @@
           </a:lstStyle>
           <a:p>
             <a:r>
-              <a:rPr lang="zh-TW" altLang="en-US" smtClean="0"/>
+              <a:rPr lang="zh-TW" altLang="en-US"/>
               <a:t>按一下以編輯母片標題樣式</a:t>
             </a:r>
-            <a:endParaRPr lang="zh-TW" altLang="en-US"/>
           </a:p>
         </p:txBody>
       </p:sp>
@@ -2396,10 +2377,9 @@
           </a:lstStyle>
           <a:p>
             <a:r>
-              <a:rPr lang="zh-TW" altLang="en-US" smtClean="0"/>
+              <a:rPr lang="zh-TW" altLang="en-US"/>
               <a:t>按一下圖示以新增圖片</a:t>
             </a:r>
-            <a:endParaRPr lang="zh-TW" altLang="en-US"/>
           </a:p>
         </p:txBody>
       </p:sp>
@@ -2462,7 +2442,7 @@
           <a:p>
             <a:pPr lvl="0"/>
             <a:r>
-              <a:rPr lang="zh-TW" altLang="en-US" smtClean="0"/>
+              <a:rPr lang="zh-TW" altLang="en-US"/>
               <a:t>按一下以編輯母片文字樣式</a:t>
             </a:r>
           </a:p>
@@ -2485,7 +2465,7 @@
           <a:p>
             <a:fld id="{DE59D944-54CB-47B0-9464-FA766A8DDC46}" type="datetimeFigureOut">
               <a:rPr lang="zh-TW" altLang="en-US" smtClean="0"/>
-              <a:t>2023/7/7</a:t>
+              <a:t>2024/7/27</a:t>
             </a:fld>
             <a:endParaRPr lang="zh-TW" altLang="en-US"/>
           </a:p>
@@ -2594,10 +2574,9 @@
           <a:lstStyle/>
           <a:p>
             <a:r>
-              <a:rPr lang="zh-TW" altLang="en-US" smtClean="0"/>
+              <a:rPr lang="zh-TW" altLang="en-US"/>
               <a:t>按一下以編輯母片標題樣式</a:t>
             </a:r>
-            <a:endParaRPr lang="zh-TW" altLang="en-US"/>
           </a:p>
         </p:txBody>
       </p:sp>
@@ -2628,38 +2607,37 @@
           <a:p>
             <a:pPr lvl="0"/>
             <a:r>
-              <a:rPr lang="zh-TW" altLang="en-US" smtClean="0"/>
+              <a:rPr lang="zh-TW" altLang="en-US"/>
               <a:t>按一下以編輯母片文字樣式</a:t>
             </a:r>
           </a:p>
           <a:p>
             <a:pPr lvl="1"/>
             <a:r>
-              <a:rPr lang="zh-TW" altLang="en-US" smtClean="0"/>
+              <a:rPr lang="zh-TW" altLang="en-US"/>
               <a:t>第二層</a:t>
             </a:r>
           </a:p>
           <a:p>
             <a:pPr lvl="2"/>
             <a:r>
-              <a:rPr lang="zh-TW" altLang="en-US" smtClean="0"/>
+              <a:rPr lang="zh-TW" altLang="en-US"/>
               <a:t>第三層</a:t>
             </a:r>
           </a:p>
           <a:p>
             <a:pPr lvl="3"/>
             <a:r>
-              <a:rPr lang="zh-TW" altLang="en-US" smtClean="0"/>
+              <a:rPr lang="zh-TW" altLang="en-US"/>
               <a:t>第四層</a:t>
             </a:r>
           </a:p>
           <a:p>
             <a:pPr lvl="4"/>
             <a:r>
-              <a:rPr lang="zh-TW" altLang="en-US" smtClean="0"/>
+              <a:rPr lang="zh-TW" altLang="en-US"/>
               <a:t>第五層</a:t>
             </a:r>
-            <a:endParaRPr lang="zh-TW" altLang="en-US"/>
           </a:p>
         </p:txBody>
       </p:sp>
@@ -2698,7 +2676,7 @@
           <a:p>
             <a:fld id="{DE59D944-54CB-47B0-9464-FA766A8DDC46}" type="datetimeFigureOut">
               <a:rPr lang="zh-TW" altLang="en-US" smtClean="0"/>
-              <a:t>2023/7/7</a:t>
+              <a:t>2024/7/27</a:t>
             </a:fld>
             <a:endParaRPr lang="zh-TW" altLang="en-US"/>
           </a:p>
@@ -3091,7 +3069,7 @@
           <a:lstStyle/>
           <a:p>
             <a:r>
-              <a:rPr lang="zh-TW" altLang="en-US" sz="5400" b="1" i="1" dirty="0" smtClean="0">
+              <a:rPr lang="zh-TW" altLang="en-US" sz="5400" b="1" i="1" dirty="0">
                 <a:solidFill>
                   <a:srgbClr val="660033"/>
                 </a:solidFill>
@@ -3105,24 +3083,7 @@
                 <a:latin typeface="微軟正黑體" pitchFamily="34" charset="-120"/>
                 <a:ea typeface="微軟正黑體" pitchFamily="34" charset="-120"/>
               </a:rPr>
-              <a:t>主</a:t>
-            </a:r>
-            <a:r>
-              <a:rPr lang="zh-TW" altLang="en-US" sz="5400" b="1" i="1" dirty="0">
-                <a:solidFill>
-                  <a:srgbClr val="660033"/>
-                </a:solidFill>
-                <a:effectLst>
-                  <a:outerShdw blurRad="38100" dist="38100" dir="2700000" algn="tl">
-                    <a:srgbClr val="000000">
-                      <a:alpha val="43137"/>
-                    </a:srgbClr>
-                  </a:outerShdw>
-                </a:effectLst>
-                <a:latin typeface="微軟正黑體" pitchFamily="34" charset="-120"/>
-                <a:ea typeface="微軟正黑體" pitchFamily="34" charset="-120"/>
-              </a:rPr>
-              <a:t>恩典</a:t>
+              <a:t>主恩典</a:t>
             </a:r>
           </a:p>
         </p:txBody>
@@ -3190,17 +3151,7 @@
                 <a:latin typeface="微軟正黑體" pitchFamily="34" charset="-120"/>
                 <a:ea typeface="微軟正黑體" pitchFamily="34" charset="-120"/>
               </a:rPr>
-              <a:t>主恩典何等美</a:t>
-            </a:r>
-            <a:r>
-              <a:rPr lang="zh-TW" altLang="en-US" sz="4800" b="1" dirty="0" smtClean="0">
-                <a:solidFill>
-                  <a:srgbClr val="660033"/>
-                </a:solidFill>
-                <a:latin typeface="微軟正黑體" pitchFamily="34" charset="-120"/>
-                <a:ea typeface="微軟正黑體" pitchFamily="34" charset="-120"/>
-              </a:rPr>
-              <a:t>好</a:t>
+              <a:t>主恩典何等美好</a:t>
             </a:r>
             <a:endParaRPr lang="en-US" altLang="zh-TW" sz="4800" b="1" dirty="0">
               <a:solidFill>
@@ -3215,34 +3166,14 @@
               <a:buNone/>
             </a:pPr>
             <a:r>
-              <a:rPr lang="zh-TW" altLang="en-US" sz="4800" b="1" dirty="0" smtClean="0">
+              <a:rPr lang="zh-TW" altLang="en-US" sz="4800" b="1" dirty="0">
                 <a:solidFill>
                   <a:srgbClr val="660033"/>
                 </a:solidFill>
                 <a:latin typeface="微軟正黑體" pitchFamily="34" charset="-120"/>
                 <a:ea typeface="微軟正黑體" pitchFamily="34" charset="-120"/>
               </a:rPr>
-              <a:t>比</a:t>
-            </a:r>
-            <a:r>
-              <a:rPr lang="zh-TW" altLang="en-US" sz="4800" b="1" dirty="0">
-                <a:solidFill>
-                  <a:srgbClr val="660033"/>
-                </a:solidFill>
-                <a:latin typeface="微軟正黑體" pitchFamily="34" charset="-120"/>
-                <a:ea typeface="微軟正黑體" pitchFamily="34" charset="-120"/>
-              </a:rPr>
-              <a:t>海深也比山</a:t>
-            </a:r>
-            <a:r>
-              <a:rPr lang="zh-TW" altLang="en-US" sz="4800" b="1" dirty="0" smtClean="0">
-                <a:solidFill>
-                  <a:srgbClr val="660033"/>
-                </a:solidFill>
-                <a:latin typeface="微軟正黑體" pitchFamily="34" charset="-120"/>
-                <a:ea typeface="微軟正黑體" pitchFamily="34" charset="-120"/>
-              </a:rPr>
-              <a:t>高</a:t>
+              <a:t>比海深也比山高</a:t>
             </a:r>
             <a:endParaRPr lang="en-US" altLang="zh-TW" sz="4800" b="1" dirty="0">
               <a:solidFill>
@@ -3263,7 +3194,7 @@
         <p:spPr>
           <a:xfrm>
             <a:off x="0" y="3867894"/>
-            <a:ext cx="9144000" cy="523220"/>
+            <a:ext cx="9144000" cy="461665"/>
           </a:xfrm>
           <a:prstGeom prst="rect">
             <a:avLst/>
@@ -3278,7 +3209,7 @@
           <a:p>
             <a:pPr algn="ctr"/>
             <a:r>
-              <a:rPr lang="en-US" sz="2800" b="1" dirty="0" smtClean="0">
+              <a:rPr lang="en-US" sz="2400" b="1" dirty="0">
                 <a:solidFill>
                   <a:srgbClr val="660033"/>
                 </a:solidFill>
@@ -3288,17 +3219,17 @@
               <a:t>( </a:t>
             </a:r>
             <a:r>
-              <a:rPr lang="zh-CN" altLang="en-US" sz="2800" b="1" dirty="0" smtClean="0">
+              <a:rPr lang="zh-CN" altLang="en-US" sz="2400" b="1" dirty="0">
                 <a:solidFill>
                   <a:srgbClr val="660033"/>
                 </a:solidFill>
                 <a:latin typeface="Microsoft JhengHei" panose="020B0604030504040204" pitchFamily="34" charset="-120"/>
                 <a:ea typeface="Microsoft JhengHei" panose="020B0604030504040204" pitchFamily="34" charset="-120"/>
               </a:rPr>
-              <a:t>正</a:t>
-            </a:r>
-            <a:r>
-              <a:rPr lang="en-US" sz="2800" b="1" dirty="0" smtClean="0">
+              <a:t>正歌</a:t>
+            </a:r>
+            <a:r>
+              <a:rPr lang="en-US" sz="2400" b="1" dirty="0">
                 <a:solidFill>
                   <a:srgbClr val="660033"/>
                 </a:solidFill>
@@ -3307,7 +3238,7 @@
               </a:rPr>
               <a:t> )</a:t>
             </a:r>
-            <a:endParaRPr lang="vi-VN" sz="2800" b="1" dirty="0">
+            <a:endParaRPr lang="vi-VN" sz="2400" b="1" dirty="0">
               <a:solidFill>
                 <a:srgbClr val="660033"/>
               </a:solidFill>
@@ -3415,7 +3346,7 @@
         <p:spPr>
           <a:xfrm>
             <a:off x="0" y="3867894"/>
-            <a:ext cx="9144000" cy="523220"/>
+            <a:ext cx="9144000" cy="461665"/>
           </a:xfrm>
           <a:prstGeom prst="rect">
             <a:avLst/>
@@ -3430,7 +3361,7 @@
           <a:p>
             <a:pPr algn="ctr"/>
             <a:r>
-              <a:rPr lang="en-US" sz="2800" b="1" dirty="0">
+              <a:rPr lang="en-US" sz="2400" b="1" dirty="0">
                 <a:solidFill>
                   <a:srgbClr val="660033"/>
                 </a:solidFill>
@@ -3440,17 +3371,17 @@
               <a:t>( </a:t>
             </a:r>
             <a:r>
-              <a:rPr lang="zh-CN" altLang="en-US" sz="2800" b="1" dirty="0">
+              <a:rPr lang="zh-CN" altLang="en-US" sz="2400" b="1" dirty="0">
                 <a:solidFill>
                   <a:srgbClr val="660033"/>
                 </a:solidFill>
                 <a:latin typeface="Microsoft JhengHei" panose="020B0604030504040204" pitchFamily="34" charset="-120"/>
                 <a:ea typeface="Microsoft JhengHei" panose="020B0604030504040204" pitchFamily="34" charset="-120"/>
               </a:rPr>
-              <a:t>正</a:t>
-            </a:r>
-            <a:r>
-              <a:rPr lang="en-US" sz="2800" b="1" dirty="0">
+              <a:t>正歌</a:t>
+            </a:r>
+            <a:r>
+              <a:rPr lang="en-US" sz="2400" b="1" dirty="0">
                 <a:solidFill>
                   <a:srgbClr val="660033"/>
                 </a:solidFill>
@@ -3459,11 +3390,10 @@
               </a:rPr>
               <a:t> )</a:t>
             </a:r>
-            <a:endParaRPr lang="vi-VN" sz="2800" b="1" dirty="0">
+            <a:endParaRPr lang="vi-VN" sz="2400" b="1" dirty="0">
               <a:solidFill>
                 <a:srgbClr val="660033"/>
               </a:solidFill>
-              <a:latin typeface="Microsoft JhengHei" panose="020B0604030504040204" pitchFamily="34" charset="-120"/>
               <a:ea typeface="Microsoft JhengHei" panose="020B0604030504040204" pitchFamily="34" charset="-120"/>
             </a:endParaRPr>
           </a:p>
@@ -3575,7 +3505,7 @@
         <p:spPr>
           <a:xfrm>
             <a:off x="0" y="3867894"/>
-            <a:ext cx="9144000" cy="523220"/>
+            <a:ext cx="9144000" cy="461665"/>
           </a:xfrm>
           <a:prstGeom prst="rect">
             <a:avLst/>
@@ -3590,7 +3520,7 @@
           <a:p>
             <a:pPr algn="ctr"/>
             <a:r>
-              <a:rPr lang="en-US" sz="2800" b="1" dirty="0">
+              <a:rPr lang="en-US" sz="2400" b="1" dirty="0">
                 <a:solidFill>
                   <a:srgbClr val="660033"/>
                 </a:solidFill>
@@ -3600,17 +3530,17 @@
               <a:t>( </a:t>
             </a:r>
             <a:r>
-              <a:rPr lang="zh-CN" altLang="en-US" sz="2800" b="1" dirty="0">
+              <a:rPr lang="zh-CN" altLang="en-US" sz="2400" b="1" dirty="0">
                 <a:solidFill>
                   <a:srgbClr val="660033"/>
                 </a:solidFill>
                 <a:latin typeface="Microsoft JhengHei" panose="020B0604030504040204" pitchFamily="34" charset="-120"/>
                 <a:ea typeface="Microsoft JhengHei" panose="020B0604030504040204" pitchFamily="34" charset="-120"/>
               </a:rPr>
-              <a:t>副</a:t>
-            </a:r>
-            <a:r>
-              <a:rPr lang="en-US" sz="2800" b="1" dirty="0">
+              <a:t>副歌</a:t>
+            </a:r>
+            <a:r>
+              <a:rPr lang="en-US" sz="2400" b="1" dirty="0">
                 <a:solidFill>
                   <a:srgbClr val="660033"/>
                 </a:solidFill>
@@ -3619,11 +3549,10 @@
               </a:rPr>
               <a:t> )</a:t>
             </a:r>
-            <a:endParaRPr lang="vi-VN" sz="2800" b="1" dirty="0">
+            <a:endParaRPr lang="vi-VN" sz="2400" b="1" dirty="0">
               <a:solidFill>
                 <a:srgbClr val="660033"/>
               </a:solidFill>
-              <a:latin typeface="Microsoft JhengHei" panose="020B0604030504040204" pitchFamily="34" charset="-120"/>
               <a:ea typeface="Microsoft JhengHei" panose="020B0604030504040204" pitchFamily="34" charset="-120"/>
             </a:endParaRPr>
           </a:p>
@@ -3728,7 +3657,7 @@
         <p:spPr>
           <a:xfrm>
             <a:off x="0" y="3867894"/>
-            <a:ext cx="9144000" cy="523220"/>
+            <a:ext cx="9144000" cy="461665"/>
           </a:xfrm>
           <a:prstGeom prst="rect">
             <a:avLst/>
@@ -3743,7 +3672,7 @@
           <a:p>
             <a:pPr algn="ctr"/>
             <a:r>
-              <a:rPr lang="en-US" sz="2800" b="1" dirty="0">
+              <a:rPr lang="en-US" sz="2400" b="1" dirty="0">
                 <a:solidFill>
                   <a:srgbClr val="660033"/>
                 </a:solidFill>
@@ -3753,17 +3682,17 @@
               <a:t>( </a:t>
             </a:r>
             <a:r>
-              <a:rPr lang="zh-CN" altLang="en-US" sz="2800" b="1" dirty="0">
+              <a:rPr lang="zh-CN" altLang="en-US" sz="2400" b="1" dirty="0">
                 <a:solidFill>
                   <a:srgbClr val="660033"/>
                 </a:solidFill>
                 <a:latin typeface="Microsoft JhengHei" panose="020B0604030504040204" pitchFamily="34" charset="-120"/>
                 <a:ea typeface="Microsoft JhengHei" panose="020B0604030504040204" pitchFamily="34" charset="-120"/>
               </a:rPr>
-              <a:t>副</a:t>
-            </a:r>
-            <a:r>
-              <a:rPr lang="en-US" sz="2800" b="1" dirty="0">
+              <a:t>副歌</a:t>
+            </a:r>
+            <a:r>
+              <a:rPr lang="en-US" sz="2400" b="1" dirty="0">
                 <a:solidFill>
                   <a:srgbClr val="660033"/>
                 </a:solidFill>
@@ -3772,11 +3701,10 @@
               </a:rPr>
               <a:t> )</a:t>
             </a:r>
-            <a:endParaRPr lang="vi-VN" sz="2800" b="1" dirty="0">
+            <a:endParaRPr lang="vi-VN" sz="2400" b="1" dirty="0">
               <a:solidFill>
                 <a:srgbClr val="660033"/>
               </a:solidFill>
-              <a:latin typeface="Microsoft JhengHei" panose="020B0604030504040204" pitchFamily="34" charset="-120"/>
               <a:ea typeface="Microsoft JhengHei" panose="020B0604030504040204" pitchFamily="34" charset="-120"/>
             </a:endParaRPr>
           </a:p>
@@ -3888,7 +3816,7 @@
         <p:spPr>
           <a:xfrm>
             <a:off x="0" y="3867894"/>
-            <a:ext cx="9144000" cy="523220"/>
+            <a:ext cx="9144000" cy="461665"/>
           </a:xfrm>
           <a:prstGeom prst="rect">
             <a:avLst/>
@@ -3903,7 +3831,7 @@
           <a:p>
             <a:pPr algn="ctr"/>
             <a:r>
-              <a:rPr lang="en-US" sz="2800" b="1" dirty="0">
+              <a:rPr lang="en-US" sz="2400" b="1" dirty="0">
                 <a:solidFill>
                   <a:srgbClr val="660033"/>
                 </a:solidFill>
@@ -3913,17 +3841,17 @@
               <a:t>( </a:t>
             </a:r>
             <a:r>
-              <a:rPr lang="zh-CN" altLang="en-US" sz="2800" b="1" dirty="0">
+              <a:rPr lang="zh-CN" altLang="en-US" sz="2400" b="1" dirty="0">
                 <a:solidFill>
                   <a:srgbClr val="660033"/>
                 </a:solidFill>
                 <a:latin typeface="Microsoft JhengHei" panose="020B0604030504040204" pitchFamily="34" charset="-120"/>
                 <a:ea typeface="Microsoft JhengHei" panose="020B0604030504040204" pitchFamily="34" charset="-120"/>
               </a:rPr>
-              <a:t>副</a:t>
-            </a:r>
-            <a:r>
-              <a:rPr lang="en-US" sz="2800" b="1" dirty="0">
+              <a:t>副歌</a:t>
+            </a:r>
+            <a:r>
+              <a:rPr lang="en-US" sz="2400" b="1" dirty="0">
                 <a:solidFill>
                   <a:srgbClr val="660033"/>
                 </a:solidFill>
@@ -3932,11 +3860,10 @@
               </a:rPr>
               <a:t> )</a:t>
             </a:r>
-            <a:endParaRPr lang="vi-VN" sz="2800" b="1" dirty="0">
+            <a:endParaRPr lang="vi-VN" sz="2400" b="1" dirty="0">
               <a:solidFill>
                 <a:srgbClr val="660033"/>
               </a:solidFill>
-              <a:latin typeface="Microsoft JhengHei" panose="020B0604030504040204" pitchFamily="34" charset="-120"/>
               <a:ea typeface="Microsoft JhengHei" panose="020B0604030504040204" pitchFamily="34" charset="-120"/>
             </a:endParaRPr>
           </a:p>
@@ -4041,7 +3968,7 @@
         <p:spPr>
           <a:xfrm>
             <a:off x="0" y="3867894"/>
-            <a:ext cx="9144000" cy="523220"/>
+            <a:ext cx="9144000" cy="461665"/>
           </a:xfrm>
           <a:prstGeom prst="rect">
             <a:avLst/>
@@ -4056,7 +3983,7 @@
           <a:p>
             <a:pPr algn="ctr"/>
             <a:r>
-              <a:rPr lang="en-US" sz="2800" b="1" dirty="0">
+              <a:rPr lang="en-US" sz="2400" b="1" dirty="0">
                 <a:solidFill>
                   <a:srgbClr val="660033"/>
                 </a:solidFill>
@@ -4066,17 +3993,17 @@
               <a:t>( </a:t>
             </a:r>
             <a:r>
-              <a:rPr lang="zh-CN" altLang="en-US" sz="2800" b="1" dirty="0">
+              <a:rPr lang="zh-CN" altLang="en-US" sz="2400" b="1" dirty="0">
                 <a:solidFill>
                   <a:srgbClr val="660033"/>
                 </a:solidFill>
                 <a:latin typeface="Microsoft JhengHei" panose="020B0604030504040204" pitchFamily="34" charset="-120"/>
                 <a:ea typeface="Microsoft JhengHei" panose="020B0604030504040204" pitchFamily="34" charset="-120"/>
               </a:rPr>
-              <a:t>副</a:t>
-            </a:r>
-            <a:r>
-              <a:rPr lang="en-US" sz="2800" b="1" dirty="0">
+              <a:t>副歌</a:t>
+            </a:r>
+            <a:r>
+              <a:rPr lang="en-US" sz="2400" b="1" dirty="0">
                 <a:solidFill>
                   <a:srgbClr val="660033"/>
                 </a:solidFill>
@@ -4085,11 +4012,10 @@
               </a:rPr>
               <a:t> )</a:t>
             </a:r>
-            <a:endParaRPr lang="vi-VN" sz="2800" b="1" dirty="0">
+            <a:endParaRPr lang="vi-VN" sz="2400" b="1" dirty="0">
               <a:solidFill>
                 <a:srgbClr val="660033"/>
               </a:solidFill>
-              <a:latin typeface="Microsoft JhengHei" panose="020B0604030504040204" pitchFamily="34" charset="-120"/>
               <a:ea typeface="Microsoft JhengHei" panose="020B0604030504040204" pitchFamily="34" charset="-120"/>
             </a:endParaRPr>
           </a:p>
@@ -4221,7 +4147,7 @@
         <p:spPr>
           <a:xfrm>
             <a:off x="0" y="3867894"/>
-            <a:ext cx="9144000" cy="523220"/>
+            <a:ext cx="9144000" cy="461665"/>
           </a:xfrm>
           <a:prstGeom prst="rect">
             <a:avLst/>
@@ -4236,7 +4162,7 @@
           <a:p>
             <a:pPr algn="ctr"/>
             <a:r>
-              <a:rPr lang="en-US" sz="2800" b="1" dirty="0">
+              <a:rPr lang="en-US" sz="2400" b="1" dirty="0">
                 <a:solidFill>
                   <a:srgbClr val="660033"/>
                 </a:solidFill>
@@ -4246,17 +4172,17 @@
               <a:t>( </a:t>
             </a:r>
             <a:r>
-              <a:rPr lang="zh-CN" altLang="en-US" sz="2800" b="1" dirty="0">
+              <a:rPr lang="zh-CN" altLang="en-US" sz="2400" b="1" dirty="0">
                 <a:solidFill>
                   <a:srgbClr val="660033"/>
                 </a:solidFill>
                 <a:latin typeface="Microsoft JhengHei" panose="020B0604030504040204" pitchFamily="34" charset="-120"/>
                 <a:ea typeface="Microsoft JhengHei" panose="020B0604030504040204" pitchFamily="34" charset="-120"/>
               </a:rPr>
-              <a:t>副</a:t>
-            </a:r>
-            <a:r>
-              <a:rPr lang="en-US" sz="2800" b="1" dirty="0">
+              <a:t>副歌</a:t>
+            </a:r>
+            <a:r>
+              <a:rPr lang="en-US" sz="2400" b="1" dirty="0">
                 <a:solidFill>
                   <a:srgbClr val="660033"/>
                 </a:solidFill>
@@ -4265,11 +4191,10 @@
               </a:rPr>
               <a:t> )</a:t>
             </a:r>
-            <a:endParaRPr lang="vi-VN" sz="2800" b="1" dirty="0">
+            <a:endParaRPr lang="vi-VN" sz="2400" b="1" dirty="0">
               <a:solidFill>
                 <a:srgbClr val="660033"/>
               </a:solidFill>
-              <a:latin typeface="Microsoft JhengHei" panose="020B0604030504040204" pitchFamily="34" charset="-120"/>
               <a:ea typeface="Microsoft JhengHei" panose="020B0604030504040204" pitchFamily="34" charset="-120"/>
             </a:endParaRPr>
           </a:p>
@@ -4374,7 +4299,7 @@
         <p:spPr>
           <a:xfrm>
             <a:off x="0" y="3867894"/>
-            <a:ext cx="9144000" cy="523220"/>
+            <a:ext cx="9144000" cy="461665"/>
           </a:xfrm>
           <a:prstGeom prst="rect">
             <a:avLst/>
@@ -4389,7 +4314,7 @@
           <a:p>
             <a:pPr algn="ctr"/>
             <a:r>
-              <a:rPr lang="en-US" sz="2800" b="1" dirty="0">
+              <a:rPr lang="en-US" sz="2400" b="1" dirty="0">
                 <a:solidFill>
                   <a:srgbClr val="660033"/>
                 </a:solidFill>
@@ -4399,17 +4324,17 @@
               <a:t>( </a:t>
             </a:r>
             <a:r>
-              <a:rPr lang="zh-CN" altLang="en-US" sz="2800" b="1" dirty="0">
+              <a:rPr lang="zh-CN" altLang="en-US" sz="2400" b="1" dirty="0">
                 <a:solidFill>
                   <a:srgbClr val="660033"/>
                 </a:solidFill>
                 <a:latin typeface="Microsoft JhengHei" panose="020B0604030504040204" pitchFamily="34" charset="-120"/>
                 <a:ea typeface="Microsoft JhengHei" panose="020B0604030504040204" pitchFamily="34" charset="-120"/>
               </a:rPr>
-              <a:t>副</a:t>
-            </a:r>
-            <a:r>
-              <a:rPr lang="en-US" sz="2800" b="1" dirty="0">
+              <a:t>副歌</a:t>
+            </a:r>
+            <a:r>
+              <a:rPr lang="en-US" sz="2400" b="1" dirty="0">
                 <a:solidFill>
                   <a:srgbClr val="660033"/>
                 </a:solidFill>
@@ -4418,11 +4343,10 @@
               </a:rPr>
               <a:t> )</a:t>
             </a:r>
-            <a:endParaRPr lang="vi-VN" sz="2800" b="1" dirty="0">
+            <a:endParaRPr lang="vi-VN" sz="2400" b="1" dirty="0">
               <a:solidFill>
                 <a:srgbClr val="660033"/>
               </a:solidFill>
-              <a:latin typeface="Microsoft JhengHei" panose="020B0604030504040204" pitchFamily="34" charset="-120"/>
               <a:ea typeface="Microsoft JhengHei" panose="020B0604030504040204" pitchFamily="34" charset="-120"/>
             </a:endParaRPr>
           </a:p>
